--- a/docs/free-rwe-resources/train-the-trainer/training/day-01-omop-cdm/kit/Instructor-Deck-with-Notes.pptx
+++ b/docs/free-rwe-resources/train-the-trainer/training/day-01-omop-cdm/kit/Instructor-Deck-with-Notes.pptx
@@ -664,7 +664,7 @@
           <a:lstStyle/>
           <a:p>
             <a:r>
-              <a:t>This is the foundation of 'Include Descendants' in Atlas. Rather than listing every Metformin product by hand, you add the ingredient concept and let concept_ancestor pull in all products and forms below it. Demonstrate: run this and count how many descendants Metformin has.</a:t>
+              <a:t>This is the foundation of 'Include Descendants' in Atlas. Rather than listing every riluzole product by hand, you add the ingredient concept and let concept_ancestor pull in all products and forms below it. Demonstrate: run this and count how many descendants riluzole has.</a:t>
             </a:r>
           </a:p>
         </p:txBody>
@@ -944,7 +944,7 @@
           <a:lstStyle/>
           <a:p>
             <a:r>
-              <a:t>Focus on the top 5 (person, visit, condition, drug, measurement) for Day 1. The others will come up in later exercises. Emphasize: all these tables share person_id as the linking key.</a:t>
+              <a:t>Focus on the top 5 (person, visit, condition, drug, measurement) for Day 1. The others will come up in later exercises. Emphasize: all these tables share person_id as the linking key. For the ALS use case in this program: diagnoses of motor neuron disease are in condition_occurrence, riluzole and other ALS medications are in drug_exposure, and ALSFRS-R scores, where a site records them as structured data, are in observation or measurement depending on how the site mapped them. The ALS TDI data set stores them in observation. At many sites the scores are written in clinic notes and are not in either table.</a:t>
             </a:r>
           </a:p>
         </p:txBody>
@@ -6009,7 +6009,7 @@
             <a:pPr/>
             <a:r>
               <a:rPr sz="1600"/>
-              <a:t>Example: concept_id 201826, Type 2 diabetes mellitus (SNOMED code 44054006)</a:t>
+              <a:t>Example: concept_id 373182, Amyotrophic lateral sclerosis (SNOMED code 86044005)</a:t>
             </a:r>
           </a:p>
           <a:p>
@@ -6076,7 +6076,7 @@
             <a:pPr/>
             <a:r>
               <a:rPr sz="1600"/>
-              <a:t>Example: ICD-10-CM E11.9 maps to concept_id 201826</a:t>
+              <a:t>Example: ICD-10-CM G12.21 maps to concept_id 373182</a:t>
             </a:r>
           </a:p>
         </p:txBody>
@@ -6140,7 +6140,7 @@
             </a:pPr>
             <a:r>
               <a:rPr i="1" sz="1600"/>
-              <a:t>Find standard and non-standard concepts for Type 2 diabetes in the concept table:</a:t>
+              <a:t>Find standard and non-standard concepts for amyotrophic lateral sclerosis in the concept table:</a:t>
             </a:r>
           </a:p>
           <a:p>
@@ -6162,7 +6162,7 @@
               <a:rPr sz="1500">
                 <a:latin typeface="Courier New"/>
               </a:rPr>
-              <a:t>-- Find standard concept for Type 2 diabetes</a:t>
+              <a:t>-- Find standard concept for amyotrophic lateral sclerosis</a:t>
             </a:r>
           </a:p>
           <a:p>
@@ -6239,7 +6239,7 @@
               <a:rPr sz="1500">
                 <a:latin typeface="Courier New"/>
               </a:rPr>
-              <a:t>WHERE LOWER(concept_name) LIKE '%type 2 diabetes%'</a:t>
+              <a:t>WHERE LOWER(concept_name) LIKE '%amyotrophic lateral sclerosis%'</a:t>
             </a:r>
           </a:p>
           <a:p>
@@ -6272,7 +6272,7 @@
               <a:rPr sz="1500">
                 <a:latin typeface="Courier New"/>
               </a:rPr>
-              <a:t>-- Result: concept_id 201826 (SNOMED) is standard (S); ICD codes are non-standard (NULL)</a:t>
+              <a:t>-- Result: concept_id 373182 (SNOMED) is standard (S); ICD codes are non-standard (NULL)</a:t>
             </a:r>
           </a:p>
         </p:txBody>
@@ -6345,7 +6345,7 @@
               <a:rPr sz="1600">
                 <a:latin typeface="Courier New"/>
               </a:rPr>
-              <a:t>-- Find the standard concept that ICD-10-CM E11.9 maps to</a:t>
+              <a:t>-- Find the standard concept that ICD-10-CM G12.21 maps to</a:t>
             </a:r>
           </a:p>
           <a:p>
@@ -6455,7 +6455,7 @@
               <a:rPr sz="1600">
                 <a:latin typeface="Courier New"/>
               </a:rPr>
-              <a:t>WHERE c_src.concept_code  = 'E11.9'</a:t>
+              <a:t>WHERE c_src.concept_code  = 'G12.21'</a:t>
             </a:r>
           </a:p>
           <a:p>
@@ -6610,7 +6610,7 @@
             </a:pPr>
             <a:r>
               <a:rPr i="1" sz="1600"/>
-              <a:t>Find all drug products under the Metformin ingredient using the hierarchy:</a:t>
+              <a:t>Find all drug products under the riluzole ingredient using the hierarchy:</a:t>
             </a:r>
           </a:p>
           <a:p>
@@ -6621,7 +6621,7 @@
               <a:rPr sz="1600">
                 <a:latin typeface="Courier New"/>
               </a:rPr>
-              <a:t>-- All Metformin products (ingredient concept_id = 1503297)</a:t>
+              <a:t>-- All riluzole products (look up the ingredient concept_id in Athena first)</a:t>
             </a:r>
           </a:p>
           <a:p>
@@ -6698,7 +6698,7 @@
               <a:rPr sz="1600">
                 <a:latin typeface="Courier New"/>
               </a:rPr>
-              <a:t>WHERE ca.ancestor_concept_id = 1503297   -- Metformin (ingredient)</a:t>
+              <a:t>WHERE ca.ancestor_concept_id = [riluzole_ingredient_id]   -- riluzole (RxNorm ingredient)</a:t>
             </a:r>
           </a:p>
           <a:p>
